--- a/Classes/Week 05 - Curves/Class 05 - Curves.pptx
+++ b/Classes/Week 05 - Curves/Class 05 - Curves.pptx
@@ -7504,6 +7504,108 @@
           </a:prstGeom>
         </p:spPr>
       </p:pic>
+      <p:sp>
+        <p:nvSpPr>
+          <p:cNvPr id="2" name="TextBox 1">
+            <a:extLst>
+              <a:ext uri="{FF2B5EF4-FFF2-40B4-BE49-F238E27FC236}">
+                <a16:creationId xmlns:a16="http://schemas.microsoft.com/office/drawing/2014/main" id="{8D0CE8F1-8FB1-AB24-B0A2-AE8128D71C62}"/>
+              </a:ext>
+            </a:extLst>
+          </p:cNvPr>
+          <p:cNvSpPr txBox="1"/>
+          <p:nvPr/>
+        </p:nvSpPr>
+        <p:spPr>
+          <a:xfrm>
+            <a:off x="577112" y="4505325"/>
+            <a:ext cx="1274708" cy="369332"/>
+          </a:xfrm>
+          <a:prstGeom prst="rect">
+            <a:avLst/>
+          </a:prstGeom>
+          <a:noFill/>
+        </p:spPr>
+        <p:txBody>
+          <a:bodyPr wrap="none" rtlCol="0">
+            <a:spAutoFit/>
+          </a:bodyPr>
+          <a:lstStyle/>
+          <a:p>
+            <a:r>
+              <a:rPr lang="en-US" dirty="0"/>
+              <a:t>Y = </a:t>
+            </a:r>
+            <a:r>
+              <a:rPr lang="en-US" dirty="0" err="1"/>
+              <a:t>aX</a:t>
+            </a:r>
+            <a:r>
+              <a:rPr lang="en-US" dirty="0"/>
+              <a:t> + b</a:t>
+            </a:r>
+          </a:p>
+        </p:txBody>
+      </p:sp>
+      <p:sp>
+        <p:nvSpPr>
+          <p:cNvPr id="5" name="TextBox 4">
+            <a:extLst>
+              <a:ext uri="{FF2B5EF4-FFF2-40B4-BE49-F238E27FC236}">
+                <a16:creationId xmlns:a16="http://schemas.microsoft.com/office/drawing/2014/main" id="{6200C33E-4010-71D2-FB56-81C0514710E3}"/>
+              </a:ext>
+            </a:extLst>
+          </p:cNvPr>
+          <p:cNvSpPr txBox="1"/>
+          <p:nvPr/>
+        </p:nvSpPr>
+        <p:spPr>
+          <a:xfrm>
+            <a:off x="577112" y="5632966"/>
+            <a:ext cx="2392001" cy="369332"/>
+          </a:xfrm>
+          <a:prstGeom prst="rect">
+            <a:avLst/>
+          </a:prstGeom>
+          <a:noFill/>
+        </p:spPr>
+        <p:txBody>
+          <a:bodyPr wrap="none" rtlCol="0">
+            <a:spAutoFit/>
+          </a:bodyPr>
+          <a:lstStyle/>
+          <a:p>
+            <a:r>
+              <a:rPr lang="en-US" dirty="0"/>
+              <a:t>Y = aX</a:t>
+            </a:r>
+            <a:r>
+              <a:rPr lang="en-US" baseline="30000" dirty="0"/>
+              <a:t>3 + b</a:t>
+            </a:r>
+            <a:r>
+              <a:rPr lang="en-US" dirty="0"/>
+              <a:t>X</a:t>
+            </a:r>
+            <a:r>
+              <a:rPr lang="en-US" baseline="30000" dirty="0"/>
+              <a:t>2</a:t>
+            </a:r>
+            <a:r>
+              <a:rPr lang="en-US" dirty="0"/>
+              <a:t> + </a:t>
+            </a:r>
+            <a:r>
+              <a:rPr lang="en-US" dirty="0" err="1"/>
+              <a:t>cX</a:t>
+            </a:r>
+            <a:r>
+              <a:rPr lang="en-US" dirty="0"/>
+              <a:t> + d</a:t>
+            </a:r>
+          </a:p>
+        </p:txBody>
+      </p:sp>
     </p:spTree>
     <p:extLst>
       <p:ext uri="{BB962C8B-B14F-4D97-AF65-F5344CB8AC3E}">
@@ -10914,6 +11016,88 @@
           </a:prstGeom>
         </p:spPr>
       </p:pic>
+      <p:sp>
+        <p:nvSpPr>
+          <p:cNvPr id="3" name="TextBox 2">
+            <a:extLst>
+              <a:ext uri="{FF2B5EF4-FFF2-40B4-BE49-F238E27FC236}">
+                <a16:creationId xmlns:a16="http://schemas.microsoft.com/office/drawing/2014/main" id="{6C7E2305-BE32-1288-00C9-D073A92E8C7B}"/>
+              </a:ext>
+            </a:extLst>
+          </p:cNvPr>
+          <p:cNvSpPr txBox="1"/>
+          <p:nvPr/>
+        </p:nvSpPr>
+        <p:spPr>
+          <a:xfrm>
+            <a:off x="1645920" y="1328816"/>
+            <a:ext cx="423514" cy="369332"/>
+          </a:xfrm>
+          <a:prstGeom prst="rect">
+            <a:avLst/>
+          </a:prstGeom>
+          <a:solidFill>
+            <a:schemeClr val="bg1"/>
+          </a:solidFill>
+        </p:spPr>
+        <p:txBody>
+          <a:bodyPr wrap="none" rtlCol="0">
+            <a:spAutoFit/>
+          </a:bodyPr>
+          <a:lstStyle/>
+          <a:p>
+            <a:r>
+              <a:rPr lang="en-US" dirty="0"/>
+              <a:t>P</a:t>
+            </a:r>
+            <a:r>
+              <a:rPr lang="en-US" baseline="-25000" dirty="0"/>
+              <a:t>0</a:t>
+            </a:r>
+          </a:p>
+        </p:txBody>
+      </p:sp>
+      <p:sp>
+        <p:nvSpPr>
+          <p:cNvPr id="4" name="TextBox 3">
+            <a:extLst>
+              <a:ext uri="{FF2B5EF4-FFF2-40B4-BE49-F238E27FC236}">
+                <a16:creationId xmlns:a16="http://schemas.microsoft.com/office/drawing/2014/main" id="{62F05565-DA02-CEF4-0269-D8AB62D4E2B7}"/>
+              </a:ext>
+            </a:extLst>
+          </p:cNvPr>
+          <p:cNvSpPr txBox="1"/>
+          <p:nvPr/>
+        </p:nvSpPr>
+        <p:spPr>
+          <a:xfrm>
+            <a:off x="2845768" y="1068093"/>
+            <a:ext cx="423514" cy="369332"/>
+          </a:xfrm>
+          <a:prstGeom prst="rect">
+            <a:avLst/>
+          </a:prstGeom>
+          <a:solidFill>
+            <a:schemeClr val="bg1"/>
+          </a:solidFill>
+        </p:spPr>
+        <p:txBody>
+          <a:bodyPr wrap="none" rtlCol="0">
+            <a:spAutoFit/>
+          </a:bodyPr>
+          <a:lstStyle/>
+          <a:p>
+            <a:r>
+              <a:rPr lang="en-US" dirty="0"/>
+              <a:t>P</a:t>
+            </a:r>
+            <a:r>
+              <a:rPr lang="en-US" baseline="-25000" dirty="0"/>
+              <a:t>1</a:t>
+            </a:r>
+          </a:p>
+        </p:txBody>
+      </p:sp>
     </p:spTree>
     <p:extLst>
       <p:ext uri="{BB962C8B-B14F-4D97-AF65-F5344CB8AC3E}">
@@ -11071,36 +11255,6 @@
           </a:prstGeom>
         </p:spPr>
       </p:pic>
-      <p:pic>
-        <p:nvPicPr>
-          <p:cNvPr id="14" name="Picture 13">
-            <a:extLst>
-              <a:ext uri="{FF2B5EF4-FFF2-40B4-BE49-F238E27FC236}">
-                <a16:creationId xmlns:a16="http://schemas.microsoft.com/office/drawing/2014/main" id="{7A750D8A-22DF-FC82-1569-B3074943159E}"/>
-              </a:ext>
-            </a:extLst>
-          </p:cNvPr>
-          <p:cNvPicPr>
-            <a:picLocks noChangeAspect="1"/>
-          </p:cNvPicPr>
-          <p:nvPr/>
-        </p:nvPicPr>
-        <p:blipFill>
-          <a:blip r:embed="rId3"/>
-          <a:stretch>
-            <a:fillRect/>
-          </a:stretch>
-        </p:blipFill>
-        <p:spPr>
-          <a:xfrm>
-            <a:off x="761998" y="6002426"/>
-            <a:ext cx="5353325" cy="3702240"/>
-          </a:xfrm>
-          <a:prstGeom prst="rect">
-            <a:avLst/>
-          </a:prstGeom>
-        </p:spPr>
-      </p:pic>
       <p:sp>
         <p:nvSpPr>
           <p:cNvPr id="5" name="TextBox 4">
@@ -11116,7 +11270,7 @@
         <p:spPr>
           <a:xfrm>
             <a:off x="761998" y="1120588"/>
-            <a:ext cx="4226478" cy="5247590"/>
+            <a:ext cx="4226478" cy="8017579"/>
           </a:xfrm>
           <a:prstGeom prst="rect">
             <a:avLst/>
@@ -11231,7 +11385,7 @@
                 <a:latin typeface="Verdana"/>
                 <a:cs typeface="Verdana"/>
               </a:rPr>
-              <a:t> </a:t>
+              <a:t> 1*</a:t>
             </a:r>
             <a:r>
               <a:rPr lang="en-US" dirty="0">
@@ -11443,37 +11597,323 @@
                 <a:srgbClr val="FFFF00"/>
               </a:highlight>
               <a:latin typeface="Verdana"/>
+              <a:cs typeface="Verdana"/>
             </a:endParaRPr>
           </a:p>
           <a:p>
+            <a:r>
+              <a:rPr kumimoji="0" lang="en-US" b="0" i="1" u="none" strike="noStrike" kern="0" cap="none" spc="-30" normalizeH="0" baseline="0" noProof="0" dirty="0">
+                <a:ln>
+                  <a:noFill/>
+                </a:ln>
+                <a:solidFill>
+                  <a:sysClr val="windowText" lastClr="000000"/>
+                </a:solidFill>
+                <a:effectLst/>
+                <a:highlight>
+                  <a:srgbClr val="FFFF00"/>
+                </a:highlight>
+                <a:uLnTx/>
+                <a:uFillTx/>
+                <a:latin typeface="Verdana"/>
+                <a:cs typeface="Verdana"/>
+              </a:rPr>
+              <a:t>C</a:t>
+            </a:r>
+            <a:r>
+              <a:rPr kumimoji="0" lang="en-US" b="0" i="1" u="none" strike="noStrike" kern="0" cap="none" spc="-30" normalizeH="0" baseline="-25000" noProof="0" dirty="0">
+                <a:ln>
+                  <a:noFill/>
+                </a:ln>
+                <a:solidFill>
+                  <a:sysClr val="windowText" lastClr="000000"/>
+                </a:solidFill>
+                <a:effectLst/>
+                <a:highlight>
+                  <a:srgbClr val="FFFF00"/>
+                </a:highlight>
+                <a:uLnTx/>
+                <a:uFillTx/>
+                <a:latin typeface="Verdana"/>
+                <a:cs typeface="Verdana"/>
+              </a:rPr>
+              <a:t>t</a:t>
+            </a:r>
+            <a:r>
+              <a:rPr kumimoji="0" lang="en-US" b="0" i="1" u="none" strike="noStrike" kern="0" cap="none" spc="-30" normalizeH="0" baseline="0" noProof="0" dirty="0">
+                <a:ln>
+                  <a:noFill/>
+                </a:ln>
+                <a:solidFill>
+                  <a:sysClr val="windowText" lastClr="000000"/>
+                </a:solidFill>
+                <a:effectLst/>
+                <a:highlight>
+                  <a:srgbClr val="FFFF00"/>
+                </a:highlight>
+                <a:uLnTx/>
+                <a:uFillTx/>
+                <a:latin typeface="Verdana"/>
+                <a:cs typeface="Verdana"/>
+              </a:rPr>
+              <a:t> </a:t>
+            </a:r>
+            <a:r>
+              <a:rPr kumimoji="0" lang="en-US" b="0" i="0" u="none" strike="noStrike" kern="0" cap="none" spc="0" normalizeH="0" baseline="0" noProof="0" dirty="0">
+                <a:ln>
+                  <a:noFill/>
+                </a:ln>
+                <a:solidFill>
+                  <a:sysClr val="windowText" lastClr="000000"/>
+                </a:solidFill>
+                <a:effectLst/>
+                <a:highlight>
+                  <a:srgbClr val="FFFF00"/>
+                </a:highlight>
+                <a:uLnTx/>
+                <a:uFillTx/>
+                <a:latin typeface="Verdana"/>
+                <a:cs typeface="Verdana"/>
+              </a:rPr>
+              <a:t>=</a:t>
+            </a:r>
+            <a:r>
+              <a:rPr kumimoji="0" lang="en-US" b="0" i="0" u="none" strike="noStrike" kern="0" cap="none" spc="-25" normalizeH="0" baseline="0" noProof="0" dirty="0">
+                <a:ln>
+                  <a:noFill/>
+                </a:ln>
+                <a:solidFill>
+                  <a:sysClr val="windowText" lastClr="000000"/>
+                </a:solidFill>
+                <a:effectLst/>
+                <a:highlight>
+                  <a:srgbClr val="FFFF00"/>
+                </a:highlight>
+                <a:uLnTx/>
+                <a:uFillTx/>
+                <a:latin typeface="Verdana"/>
+                <a:cs typeface="Verdana"/>
+              </a:rPr>
+              <a:t> (1-t) * </a:t>
+            </a:r>
             <a:r>
               <a:rPr lang="en-US" dirty="0">
                 <a:highlight>
                   <a:srgbClr val="FFFF00"/>
                 </a:highlight>
                 <a:latin typeface="Verdana"/>
-              </a:rPr>
-              <a:t>OR</a:t>
-            </a:r>
-            <a:endParaRPr lang="en-US" dirty="0"/>
-          </a:p>
-          <a:p>
-            <a:endParaRPr lang="en-US" dirty="0"/>
-          </a:p>
-          <a:p>
+                <a:cs typeface="Verdana"/>
+              </a:rPr>
+              <a:t>P</a:t>
+            </a:r>
+            <a:r>
+              <a:rPr lang="en-US" baseline="-25000" dirty="0">
+                <a:highlight>
+                  <a:srgbClr val="FFFF00"/>
+                </a:highlight>
+                <a:latin typeface="Verdana"/>
+                <a:cs typeface="Verdana"/>
+              </a:rPr>
+              <a:t>0</a:t>
+            </a:r>
+            <a:r>
+              <a:rPr kumimoji="0" lang="en-US" b="0" i="0" u="none" strike="noStrike" kern="0" cap="none" spc="-30" normalizeH="0" baseline="0" noProof="0" dirty="0">
+                <a:ln>
+                  <a:noFill/>
+                </a:ln>
+                <a:solidFill>
+                  <a:sysClr val="windowText" lastClr="000000"/>
+                </a:solidFill>
+                <a:effectLst/>
+                <a:highlight>
+                  <a:srgbClr val="FFFF00"/>
+                </a:highlight>
+                <a:uLnTx/>
+                <a:uFillTx/>
+                <a:latin typeface="Verdana"/>
+                <a:cs typeface="Verdana"/>
+              </a:rPr>
+              <a:t>     </a:t>
+            </a:r>
+            <a:r>
+              <a:rPr kumimoji="0" lang="en-US" b="0" i="0" u="none" strike="noStrike" kern="0" cap="none" spc="0" normalizeH="0" baseline="0" noProof="0" dirty="0">
+                <a:ln>
+                  <a:noFill/>
+                </a:ln>
+                <a:solidFill>
+                  <a:sysClr val="windowText" lastClr="000000"/>
+                </a:solidFill>
+                <a:effectLst/>
+                <a:highlight>
+                  <a:srgbClr val="FFFF00"/>
+                </a:highlight>
+                <a:uLnTx/>
+                <a:uFillTx/>
+                <a:latin typeface="Verdana"/>
+                <a:cs typeface="Verdana"/>
+              </a:rPr>
+              <a:t>+</a:t>
+            </a:r>
+            <a:r>
+              <a:rPr kumimoji="0" lang="en-US" b="0" i="0" u="none" strike="noStrike" kern="0" cap="none" spc="-25" normalizeH="0" baseline="0" noProof="0" dirty="0">
+                <a:ln>
+                  <a:noFill/>
+                </a:ln>
+                <a:solidFill>
+                  <a:sysClr val="windowText" lastClr="000000"/>
+                </a:solidFill>
+                <a:effectLst/>
+                <a:highlight>
+                  <a:srgbClr val="FFFF00"/>
+                </a:highlight>
+                <a:uLnTx/>
+                <a:uFillTx/>
+                <a:latin typeface="Verdana"/>
+                <a:cs typeface="Verdana"/>
+              </a:rPr>
+              <a:t>     </a:t>
+            </a:r>
+            <a:r>
+              <a:rPr kumimoji="0" lang="en-US" b="0" i="0" u="none" strike="noStrike" kern="0" cap="none" spc="0" normalizeH="0" baseline="0" noProof="0" dirty="0">
+                <a:ln>
+                  <a:noFill/>
+                </a:ln>
+                <a:solidFill>
+                  <a:sysClr val="windowText" lastClr="000000"/>
+                </a:solidFill>
+                <a:effectLst/>
+                <a:highlight>
+                  <a:srgbClr val="FFFF00"/>
+                </a:highlight>
+                <a:uLnTx/>
+                <a:uFillTx/>
+                <a:latin typeface="Verdana"/>
+                <a:cs typeface="Verdana"/>
+              </a:rPr>
+              <a:t>t</a:t>
+            </a:r>
+            <a:r>
+              <a:rPr kumimoji="0" lang="en-US" b="0" i="0" u="none" strike="noStrike" kern="0" cap="none" spc="-30" normalizeH="0" baseline="0" noProof="0" dirty="0">
+                <a:ln>
+                  <a:noFill/>
+                </a:ln>
+                <a:solidFill>
+                  <a:sysClr val="windowText" lastClr="000000"/>
+                </a:solidFill>
+                <a:effectLst/>
+                <a:highlight>
+                  <a:srgbClr val="FFFF00"/>
+                </a:highlight>
+                <a:uLnTx/>
+                <a:uFillTx/>
+                <a:latin typeface="Verdana"/>
+                <a:cs typeface="Verdana"/>
+              </a:rPr>
+              <a:t> </a:t>
+            </a:r>
+            <a:r>
+              <a:rPr kumimoji="0" lang="en-US" b="0" i="0" u="none" strike="noStrike" kern="0" cap="none" spc="0" normalizeH="0" baseline="0" noProof="0" dirty="0">
+                <a:ln>
+                  <a:noFill/>
+                </a:ln>
+                <a:solidFill>
+                  <a:sysClr val="windowText" lastClr="000000"/>
+                </a:solidFill>
+                <a:effectLst/>
+                <a:highlight>
+                  <a:srgbClr val="FFFF00"/>
+                </a:highlight>
+                <a:uLnTx/>
+                <a:uFillTx/>
+                <a:latin typeface="Verdana"/>
+                <a:cs typeface="Verdana"/>
+              </a:rPr>
+              <a:t>*</a:t>
+            </a:r>
+            <a:r>
+              <a:rPr kumimoji="0" lang="en-US" b="0" i="0" u="none" strike="noStrike" kern="0" cap="none" spc="-25" normalizeH="0" baseline="0" noProof="0" dirty="0">
+                <a:ln>
+                  <a:noFill/>
+                </a:ln>
+                <a:solidFill>
+                  <a:sysClr val="windowText" lastClr="000000"/>
+                </a:solidFill>
+                <a:effectLst/>
+                <a:highlight>
+                  <a:srgbClr val="FFFF00"/>
+                </a:highlight>
+                <a:uLnTx/>
+                <a:uFillTx/>
+                <a:latin typeface="Verdana"/>
+                <a:cs typeface="Verdana"/>
+              </a:rPr>
+              <a:t> </a:t>
+            </a:r>
             <a:r>
               <a:rPr lang="en-US" dirty="0">
                 <a:highlight>
                   <a:srgbClr val="FFFF00"/>
                 </a:highlight>
-              </a:rPr>
-              <a:t>C</a:t>
+                <a:latin typeface="Verdana"/>
+                <a:cs typeface="Verdana"/>
+              </a:rPr>
+              <a:t>P</a:t>
             </a:r>
             <a:r>
               <a:rPr lang="en-US" baseline="-25000" dirty="0">
                 <a:highlight>
                   <a:srgbClr val="FFFF00"/>
                 </a:highlight>
+                <a:latin typeface="Verdana"/>
+                <a:cs typeface="Verdana"/>
+              </a:rPr>
+              <a:t>1</a:t>
+            </a:r>
+            <a:endParaRPr lang="en-US" dirty="0">
+              <a:highlight>
+                <a:srgbClr val="FFFF00"/>
+              </a:highlight>
+              <a:latin typeface="Verdana"/>
+              <a:cs typeface="Verdana"/>
+            </a:endParaRPr>
+          </a:p>
+          <a:p>
+            <a:endParaRPr lang="en-US" dirty="0">
+              <a:highlight>
+                <a:srgbClr val="FFFF00"/>
+              </a:highlight>
+              <a:latin typeface="Verdana"/>
+            </a:endParaRPr>
+          </a:p>
+          <a:p>
+            <a:r>
+              <a:rPr lang="en-US" dirty="0">
+                <a:highlight>
+                  <a:srgbClr val="FFFF00"/>
+                </a:highlight>
+                <a:latin typeface="Verdana"/>
+              </a:rPr>
+              <a:t>OR</a:t>
+            </a:r>
+            <a:endParaRPr lang="en-US" dirty="0"/>
+          </a:p>
+          <a:p>
+            <a:endParaRPr lang="en-US" dirty="0"/>
+          </a:p>
+          <a:p>
+            <a:r>
+              <a:rPr lang="en-US" dirty="0">
+                <a:highlight>
+                  <a:srgbClr val="FFFF00"/>
+                </a:highlight>
+              </a:rPr>
+              <a:t>C</a:t>
+            </a:r>
+            <a:r>
+              <a:rPr lang="en-US" baseline="-25000" dirty="0">
+                <a:highlight>
+                  <a:srgbClr val="FFFF00"/>
+                </a:highlight>
               </a:rPr>
               <a:t>t</a:t>
             </a:r>
@@ -11491,8 +11931,177 @@
                   <a:srgbClr val="FFFF00"/>
                 </a:highlight>
               </a:rPr>
-              <a:t>=  (1-t)*p1 + t*p2</a:t>
-            </a:r>
+              <a:t>=  (1-t)*P0 + t*P1</a:t>
+            </a:r>
+          </a:p>
+          <a:p>
+            <a:endParaRPr lang="en-US" dirty="0">
+              <a:highlight>
+                <a:srgbClr val="FFFF00"/>
+              </a:highlight>
+            </a:endParaRPr>
+          </a:p>
+          <a:p>
+            <a:r>
+              <a:rPr lang="en-US" dirty="0">
+                <a:highlight>
+                  <a:srgbClr val="FFFF00"/>
+                </a:highlight>
+              </a:rPr>
+              <a:t>C</a:t>
+            </a:r>
+            <a:r>
+              <a:rPr lang="en-US" baseline="-25000" dirty="0">
+                <a:highlight>
+                  <a:srgbClr val="FFFF00"/>
+                </a:highlight>
+              </a:rPr>
+              <a:t>t=0</a:t>
+            </a:r>
+            <a:r>
+              <a:rPr lang="en-US" i="1" baseline="30000" dirty="0">
+                <a:highlight>
+                  <a:srgbClr val="FFFF00"/>
+                </a:highlight>
+              </a:rPr>
+              <a:t>  </a:t>
+            </a:r>
+            <a:r>
+              <a:rPr lang="en-US" dirty="0">
+                <a:highlight>
+                  <a:srgbClr val="FFFF00"/>
+                </a:highlight>
+              </a:rPr>
+              <a:t>=  (1)*P0 + 0*P1</a:t>
+            </a:r>
+          </a:p>
+          <a:p>
+            <a:endParaRPr lang="en-US" dirty="0">
+              <a:highlight>
+                <a:srgbClr val="FFFF00"/>
+              </a:highlight>
+            </a:endParaRPr>
+          </a:p>
+          <a:p>
+            <a:r>
+              <a:rPr lang="en-US" dirty="0">
+                <a:highlight>
+                  <a:srgbClr val="FFFF00"/>
+                </a:highlight>
+              </a:rPr>
+              <a:t>C</a:t>
+            </a:r>
+            <a:r>
+              <a:rPr lang="en-US" baseline="-25000" dirty="0">
+                <a:highlight>
+                  <a:srgbClr val="FFFF00"/>
+                </a:highlight>
+              </a:rPr>
+              <a:t>t=1</a:t>
+            </a:r>
+            <a:r>
+              <a:rPr lang="en-US" i="1" baseline="30000" dirty="0">
+                <a:highlight>
+                  <a:srgbClr val="FFFF00"/>
+                </a:highlight>
+              </a:rPr>
+              <a:t>  </a:t>
+            </a:r>
+            <a:r>
+              <a:rPr lang="en-US" dirty="0">
+                <a:highlight>
+                  <a:srgbClr val="FFFF00"/>
+                </a:highlight>
+              </a:rPr>
+              <a:t>=  </a:t>
+            </a:r>
+            <a:r>
+              <a:rPr lang="en-US" strike="dblStrike" dirty="0">
+                <a:highlight>
+                  <a:srgbClr val="FFFF00"/>
+                </a:highlight>
+              </a:rPr>
+              <a:t>(1-t)*P0 </a:t>
+            </a:r>
+            <a:r>
+              <a:rPr lang="en-US" dirty="0">
+                <a:highlight>
+                  <a:srgbClr val="FFFF00"/>
+                </a:highlight>
+              </a:rPr>
+              <a:t>+ </a:t>
+            </a:r>
+            <a:r>
+              <a:rPr lang="en-US" strike="dblStrike" dirty="0">
+                <a:highlight>
+                  <a:srgbClr val="FFFF00"/>
+                </a:highlight>
+              </a:rPr>
+              <a:t>t*</a:t>
+            </a:r>
+            <a:r>
+              <a:rPr lang="en-US" dirty="0">
+                <a:highlight>
+                  <a:srgbClr val="FFFF00"/>
+                </a:highlight>
+              </a:rPr>
+              <a:t>P1</a:t>
+            </a:r>
+          </a:p>
+          <a:p>
+            <a:endParaRPr lang="en-US" dirty="0">
+              <a:highlight>
+                <a:srgbClr val="FFFF00"/>
+              </a:highlight>
+            </a:endParaRPr>
+          </a:p>
+          <a:p>
+            <a:r>
+              <a:rPr lang="en-US" dirty="0">
+                <a:highlight>
+                  <a:srgbClr val="FFFF00"/>
+                </a:highlight>
+              </a:rPr>
+              <a:t>C</a:t>
+            </a:r>
+            <a:r>
+              <a:rPr lang="en-US" baseline="-25000" dirty="0">
+                <a:highlight>
+                  <a:srgbClr val="FFFF00"/>
+                </a:highlight>
+              </a:rPr>
+              <a:t>t=0.5</a:t>
+            </a:r>
+            <a:r>
+              <a:rPr lang="en-US" i="1" baseline="30000" dirty="0">
+                <a:highlight>
+                  <a:srgbClr val="FFFF00"/>
+                </a:highlight>
+              </a:rPr>
+              <a:t>  </a:t>
+            </a:r>
+            <a:r>
+              <a:rPr lang="en-US" dirty="0">
+                <a:highlight>
+                  <a:srgbClr val="FFFF00"/>
+                </a:highlight>
+              </a:rPr>
+              <a:t>=  (1-0.5)*P0 + 0.5*P1</a:t>
+            </a:r>
+          </a:p>
+          <a:p>
+            <a:endParaRPr lang="en-US" dirty="0">
+              <a:highlight>
+                <a:srgbClr val="FFFF00"/>
+              </a:highlight>
+            </a:endParaRPr>
+          </a:p>
+          <a:p>
+            <a:endParaRPr lang="en-US" dirty="0">
+              <a:highlight>
+                <a:srgbClr val="FFFF00"/>
+              </a:highlight>
+            </a:endParaRPr>
           </a:p>
           <a:p>
             <a:endParaRPr lang="en-US" dirty="0"/>
@@ -11500,7 +12109,7 @@
           <a:p>
             <a:r>
               <a:rPr lang="en-US" dirty="0"/>
-              <a:t>     =  (	 (1 – t)*p1</a:t>
+              <a:t>     =  (	 (1 – t)*p0</a:t>
             </a:r>
             <a:r>
               <a:rPr lang="en-US" baseline="-25000" dirty="0"/>
@@ -11508,7 +12117,7 @@
             </a:r>
             <a:r>
               <a:rPr lang="en-US" dirty="0"/>
-              <a:t> + t*p2</a:t>
+              <a:t> + t*p1</a:t>
             </a:r>
             <a:r>
               <a:rPr lang="en-US" baseline="-25000" dirty="0"/>
@@ -11522,7 +12131,7 @@
           <a:p>
             <a:r>
               <a:rPr lang="en-US" dirty="0"/>
-              <a:t> 	 (1 – t)*p1</a:t>
+              <a:t> 	 (1 – t)*p0</a:t>
             </a:r>
             <a:r>
               <a:rPr lang="en-US" baseline="-25000" dirty="0"/>
@@ -11530,7 +12139,7 @@
             </a:r>
             <a:r>
               <a:rPr lang="en-US" dirty="0"/>
-              <a:t> + t*p2</a:t>
+              <a:t> + t*p1</a:t>
             </a:r>
             <a:r>
               <a:rPr lang="en-US" baseline="-25000" dirty="0"/>
@@ -11544,7 +12153,7 @@
           <a:p>
             <a:r>
               <a:rPr lang="en-US" dirty="0"/>
-              <a:t> 	 (1 – t)*p1</a:t>
+              <a:t> 	 (1 – t)*p0</a:t>
             </a:r>
             <a:r>
               <a:rPr lang="en-US" baseline="-25000" dirty="0"/>
@@ -11552,7 +12161,7 @@
             </a:r>
             <a:r>
               <a:rPr lang="en-US" dirty="0"/>
-              <a:t> + t*p2</a:t>
+              <a:t> + t*p1</a:t>
             </a:r>
             <a:r>
               <a:rPr lang="en-US" baseline="-25000" dirty="0"/>
@@ -13205,7 +13814,10 @@
               <a:rPr lang="en-US" baseline="-25000" dirty="0"/>
               <a:t>2</a:t>
             </a:r>
-            <a:endParaRPr lang="en-US" dirty="0"/>
+            <a:r>
+              <a:rPr lang="en-US" dirty="0"/>
+              <a:t>+ </a:t>
+            </a:r>
           </a:p>
           <a:p>
             <a:r>
@@ -13569,7 +14181,7 @@
                     <a:srgbClr val="00FF00"/>
                   </a:highlight>
                 </a:rPr>
-                <a:t>12</a:t>
+                <a:t>23</a:t>
               </a:r>
               <a:r>
                 <a:rPr lang="en-US" dirty="0">
